--- a/1124.pptx
+++ b/1124.pptx
@@ -7815,15 +7815,7 @@
             </a:r>
             <a:r>
               <a:rPr lang="ko-KR" altLang="en-US" dirty="0"/>
-              <a:t>고객을 유일하게 식별하기 위해 </a:t>
-            </a:r>
-            <a:r>
-              <a:rPr lang="en-US" altLang="ko-KR" dirty="0"/>
-              <a:t>{</a:t>
-            </a:r>
-            <a:r>
-              <a:rPr lang="ko-KR" altLang="en-US" dirty="0"/>
-              <a:t>고객</a:t>
+              <a:t>고객을 유일하게 식별하기 위해 고객</a:t>
             </a:r>
             <a:r>
               <a:rPr lang="en-US" altLang="ko-KR" dirty="0"/>
@@ -7831,15 +7823,14 @@
             </a:r>
             <a:r>
               <a:rPr lang="ko-KR" altLang="en-US" dirty="0"/>
-              <a:t>직업</a:t>
-            </a:r>
-            <a:r>
-              <a:rPr lang="en-US" altLang="ko-KR" dirty="0"/>
-              <a:t>}</a:t>
-            </a:r>
+              <a:t>직업을 복합 </a:t>
+            </a:r>
+            <a:endParaRPr lang="en-US" altLang="ko-KR" dirty="0"/>
+          </a:p>
+          <a:p>
             <a:r>
               <a:rPr lang="ko-KR" altLang="en-US" dirty="0"/>
-              <a:t>을 복합 기본키로 지정해야 한다</a:t>
+              <a:t>기본키로 지정해야 한다</a:t>
             </a:r>
             <a:r>
               <a:rPr lang="en-US" altLang="ko-KR" dirty="0"/>
@@ -9629,14 +9620,14 @@
           <p:nvPr>
             <p:extLst>
               <p:ext uri="{D42A27DB-BD31-4B8C-83A1-F6EECF244321}">
-                <p14:modId xmlns:p14="http://schemas.microsoft.com/office/powerpoint/2010/main" val="809101554"/>
+                <p14:modId xmlns:p14="http://schemas.microsoft.com/office/powerpoint/2010/main" val="2266453706"/>
               </p:ext>
             </p:extLst>
           </p:nvPr>
         </p:nvGraphicFramePr>
         <p:xfrm>
-          <a:off x="6629400" y="154969"/>
-          <a:ext cx="3181350" cy="3204997"/>
+          <a:off x="6629399" y="154969"/>
+          <a:ext cx="4676775" cy="3183096"/>
         </p:xfrm>
         <a:graphic>
           <a:graphicData uri="http://schemas.openxmlformats.org/drawingml/2006/table">
@@ -9645,14 +9636,21 @@
                 <a:tableStyleId>{5C22544A-7EE6-4342-B048-85BDC9FD1C3A}</a:tableStyleId>
               </a:tblPr>
               <a:tblGrid>
-                <a:gridCol w="1590675">
+                <a:gridCol w="1558925">
+                  <a:extLst>
+                    <a:ext uri="{9D8B030D-6E8A-4147-A177-3AD203B41FA5}">
+                      <a16:colId xmlns:a16="http://schemas.microsoft.com/office/drawing/2014/main" val="871738188"/>
+                    </a:ext>
+                  </a:extLst>
+                </a:gridCol>
+                <a:gridCol w="1558925">
                   <a:extLst>
                     <a:ext uri="{9D8B030D-6E8A-4147-A177-3AD203B41FA5}">
                       <a16:colId xmlns:a16="http://schemas.microsoft.com/office/drawing/2014/main" val="3143398169"/>
                     </a:ext>
                   </a:extLst>
                 </a:gridCol>
-                <a:gridCol w="1590675">
+                <a:gridCol w="1558925">
                   <a:extLst>
                     <a:ext uri="{9D8B030D-6E8A-4147-A177-3AD203B41FA5}">
                       <a16:colId xmlns:a16="http://schemas.microsoft.com/office/drawing/2014/main" val="4249606791"/>
@@ -9661,7 +9659,7 @@
                 </a:gridCol>
               </a:tblGrid>
               <a:tr h="618179">
-                <a:tc gridSpan="2">
+                <a:tc gridSpan="3">
                   <a:txBody>
                     <a:bodyPr/>
                     <a:lstStyle/>
@@ -9705,15 +9703,35 @@
                     </a:p>
                   </a:txBody>
                   <a:tcPr anchor="ctr">
-                    <a:lnL w="12700" cap="flat" cmpd="sng" algn="ctr">
-                      <a:solidFill>
-                        <a:schemeClr val="tx1"/>
-                      </a:solidFill>
-                      <a:prstDash val="solid"/>
-                      <a:round/>
-                      <a:headEnd type="none" w="med" len="med"/>
-                      <a:tailEnd type="none" w="med" len="med"/>
-                    </a:lnL>
+                    <a:lnT w="12700" cap="flat" cmpd="sng" algn="ctr">
+                      <a:solidFill>
+                        <a:schemeClr val="tx1"/>
+                      </a:solidFill>
+                      <a:prstDash val="solid"/>
+                      <a:round/>
+                      <a:headEnd type="none" w="med" len="med"/>
+                      <a:tailEnd type="none" w="med" len="med"/>
+                    </a:lnT>
+                    <a:lnB w="12700" cap="flat" cmpd="sng" algn="ctr">
+                      <a:solidFill>
+                        <a:schemeClr val="tx1"/>
+                      </a:solidFill>
+                      <a:prstDash val="solid"/>
+                      <a:round/>
+                      <a:headEnd type="none" w="med" len="med"/>
+                      <a:tailEnd type="none" w="med" len="med"/>
+                    </a:lnB>
+                  </a:tcPr>
+                </a:tc>
+                <a:tc hMerge="1">
+                  <a:txBody>
+                    <a:bodyPr/>
+                    <a:lstStyle/>
+                    <a:p>
+                      <a:endParaRPr dirty="0"/>
+                    </a:p>
+                  </a:txBody>
+                  <a:tcPr anchor="ctr">
                     <a:lnT w="12700" cap="flat" cmpd="sng" algn="ctr">
                       <a:solidFill>
                         <a:schemeClr val="tx1"/>
@@ -9763,6 +9781,71 @@
                           <a:latin typeface="D2Coding" panose="020B0609020101020101" pitchFamily="49" charset="-127"/>
                           <a:ea typeface="D2Coding" panose="020B0609020101020101" pitchFamily="49" charset="-127"/>
                         </a:rPr>
+                        <a:t>직업</a:t>
+                      </a:r>
+                      <a:r>
+                        <a:rPr lang="en-US" altLang="ko-KR" dirty="0">
+                          <a:latin typeface="D2Coding" panose="020B0609020101020101" pitchFamily="49" charset="-127"/>
+                          <a:ea typeface="D2Coding" panose="020B0609020101020101" pitchFamily="49" charset="-127"/>
+                        </a:rPr>
+                        <a:t>id</a:t>
+                      </a:r>
+                      <a:endParaRPr lang="ko-KR" altLang="en-US" dirty="0">
+                        <a:latin typeface="D2Coding" panose="020B0609020101020101" pitchFamily="49" charset="-127"/>
+                        <a:ea typeface="D2Coding" panose="020B0609020101020101" pitchFamily="49" charset="-127"/>
+                      </a:endParaRPr>
+                    </a:p>
+                  </a:txBody>
+                  <a:tcPr>
+                    <a:lnL w="12700" cap="flat" cmpd="sng" algn="ctr">
+                      <a:solidFill>
+                        <a:schemeClr val="tx1"/>
+                      </a:solidFill>
+                      <a:prstDash val="solid"/>
+                      <a:round/>
+                      <a:headEnd type="none" w="med" len="med"/>
+                      <a:tailEnd type="none" w="med" len="med"/>
+                    </a:lnL>
+                    <a:lnR w="12700" cap="flat" cmpd="sng" algn="ctr">
+                      <a:solidFill>
+                        <a:schemeClr val="tx1"/>
+                      </a:solidFill>
+                      <a:prstDash val="solid"/>
+                      <a:round/>
+                      <a:headEnd type="none" w="med" len="med"/>
+                      <a:tailEnd type="none" w="med" len="med"/>
+                    </a:lnR>
+                    <a:lnT w="12700" cap="flat" cmpd="sng" algn="ctr">
+                      <a:solidFill>
+                        <a:schemeClr val="tx1"/>
+                      </a:solidFill>
+                      <a:prstDash val="solid"/>
+                      <a:round/>
+                      <a:headEnd type="none" w="med" len="med"/>
+                      <a:tailEnd type="none" w="med" len="med"/>
+                    </a:lnT>
+                    <a:lnB w="12700" cap="flat" cmpd="sng" algn="ctr">
+                      <a:solidFill>
+                        <a:schemeClr val="tx1"/>
+                      </a:solidFill>
+                      <a:prstDash val="solid"/>
+                      <a:round/>
+                      <a:headEnd type="none" w="med" len="med"/>
+                      <a:tailEnd type="none" w="med" len="med"/>
+                    </a:lnB>
+                  </a:tcPr>
+                </a:tc>
+                <a:tc>
+                  <a:txBody>
+                    <a:bodyPr/>
+                    <a:lstStyle/>
+                    <a:p>
+                      <a:pPr algn="ctr" latinLnBrk="1"/>
+                      <a:r>
+                        <a:rPr lang="ko-KR" altLang="en-US" dirty="0">
+                          <a:latin typeface="D2Coding" panose="020B0609020101020101" pitchFamily="49" charset="-127"/>
+                          <a:ea typeface="D2Coding" panose="020B0609020101020101" pitchFamily="49" charset="-127"/>
+                        </a:rPr>
                         <a:t>고객 아이디</a:t>
                       </a:r>
                     </a:p>
@@ -9869,6 +9952,64 @@
                           <a:latin typeface="D2Coding" panose="020B0609020101020101" pitchFamily="49" charset="-127"/>
                           <a:ea typeface="D2Coding" panose="020B0609020101020101" pitchFamily="49" charset="-127"/>
                         </a:rPr>
+                        <a:t>J101</a:t>
+                      </a:r>
+                      <a:endParaRPr lang="ko-KR" altLang="en-US" dirty="0">
+                        <a:latin typeface="D2Coding" panose="020B0609020101020101" pitchFamily="49" charset="-127"/>
+                        <a:ea typeface="D2Coding" panose="020B0609020101020101" pitchFamily="49" charset="-127"/>
+                      </a:endParaRPr>
+                    </a:p>
+                  </a:txBody>
+                  <a:tcPr>
+                    <a:lnL w="12700" cap="flat" cmpd="sng" algn="ctr">
+                      <a:solidFill>
+                        <a:schemeClr val="tx1"/>
+                      </a:solidFill>
+                      <a:prstDash val="solid"/>
+                      <a:round/>
+                      <a:headEnd type="none" w="med" len="med"/>
+                      <a:tailEnd type="none" w="med" len="med"/>
+                    </a:lnL>
+                    <a:lnR w="12700" cap="flat" cmpd="sng" algn="ctr">
+                      <a:solidFill>
+                        <a:schemeClr val="tx1"/>
+                      </a:solidFill>
+                      <a:prstDash val="solid"/>
+                      <a:round/>
+                      <a:headEnd type="none" w="med" len="med"/>
+                      <a:tailEnd type="none" w="med" len="med"/>
+                    </a:lnR>
+                    <a:lnT w="12700" cap="flat" cmpd="sng" algn="ctr">
+                      <a:solidFill>
+                        <a:schemeClr val="tx1"/>
+                      </a:solidFill>
+                      <a:prstDash val="solid"/>
+                      <a:round/>
+                      <a:headEnd type="none" w="med" len="med"/>
+                      <a:tailEnd type="none" w="med" len="med"/>
+                    </a:lnT>
+                    <a:lnB w="12700" cap="flat" cmpd="sng" algn="ctr">
+                      <a:solidFill>
+                        <a:schemeClr val="tx1"/>
+                      </a:solidFill>
+                      <a:prstDash val="solid"/>
+                      <a:round/>
+                      <a:headEnd type="none" w="med" len="med"/>
+                      <a:tailEnd type="none" w="med" len="med"/>
+                    </a:lnB>
+                  </a:tcPr>
+                </a:tc>
+                <a:tc>
+                  <a:txBody>
+                    <a:bodyPr/>
+                    <a:lstStyle/>
+                    <a:p>
+                      <a:pPr algn="ctr" latinLnBrk="1"/>
+                      <a:r>
+                        <a:rPr lang="en-US" altLang="ko-KR" dirty="0">
+                          <a:latin typeface="D2Coding" panose="020B0609020101020101" pitchFamily="49" charset="-127"/>
+                          <a:ea typeface="D2Coding" panose="020B0609020101020101" pitchFamily="49" charset="-127"/>
+                        </a:rPr>
                         <a:t>apple</a:t>
                       </a:r>
                       <a:endParaRPr lang="ko-KR" altLang="en-US" dirty="0">
@@ -9988,6 +10129,64 @@
                           <a:latin typeface="D2Coding" panose="020B0609020101020101" pitchFamily="49" charset="-127"/>
                           <a:ea typeface="D2Coding" panose="020B0609020101020101" pitchFamily="49" charset="-127"/>
                         </a:rPr>
+                        <a:t>J102</a:t>
+                      </a:r>
+                      <a:endParaRPr lang="ko-KR" altLang="en-US" dirty="0">
+                        <a:latin typeface="D2Coding" panose="020B0609020101020101" pitchFamily="49" charset="-127"/>
+                        <a:ea typeface="D2Coding" panose="020B0609020101020101" pitchFamily="49" charset="-127"/>
+                      </a:endParaRPr>
+                    </a:p>
+                  </a:txBody>
+                  <a:tcPr>
+                    <a:lnL w="12700" cap="flat" cmpd="sng" algn="ctr">
+                      <a:solidFill>
+                        <a:schemeClr val="tx1"/>
+                      </a:solidFill>
+                      <a:prstDash val="solid"/>
+                      <a:round/>
+                      <a:headEnd type="none" w="med" len="med"/>
+                      <a:tailEnd type="none" w="med" len="med"/>
+                    </a:lnL>
+                    <a:lnR w="12700" cap="flat" cmpd="sng" algn="ctr">
+                      <a:solidFill>
+                        <a:schemeClr val="tx1"/>
+                      </a:solidFill>
+                      <a:prstDash val="solid"/>
+                      <a:round/>
+                      <a:headEnd type="none" w="med" len="med"/>
+                      <a:tailEnd type="none" w="med" len="med"/>
+                    </a:lnR>
+                    <a:lnT w="12700" cap="flat" cmpd="sng" algn="ctr">
+                      <a:solidFill>
+                        <a:schemeClr val="tx1"/>
+                      </a:solidFill>
+                      <a:prstDash val="solid"/>
+                      <a:round/>
+                      <a:headEnd type="none" w="med" len="med"/>
+                      <a:tailEnd type="none" w="med" len="med"/>
+                    </a:lnT>
+                    <a:lnB w="12700" cap="flat" cmpd="sng" algn="ctr">
+                      <a:solidFill>
+                        <a:schemeClr val="tx1"/>
+                      </a:solidFill>
+                      <a:prstDash val="solid"/>
+                      <a:round/>
+                      <a:headEnd type="none" w="med" len="med"/>
+                      <a:tailEnd type="none" w="med" len="med"/>
+                    </a:lnB>
+                  </a:tcPr>
+                </a:tc>
+                <a:tc>
+                  <a:txBody>
+                    <a:bodyPr/>
+                    <a:lstStyle/>
+                    <a:p>
+                      <a:pPr algn="ctr" latinLnBrk="1"/>
+                      <a:r>
+                        <a:rPr lang="en-US" altLang="ko-KR" dirty="0">
+                          <a:latin typeface="D2Coding" panose="020B0609020101020101" pitchFamily="49" charset="-127"/>
+                          <a:ea typeface="D2Coding" panose="020B0609020101020101" pitchFamily="49" charset="-127"/>
+                        </a:rPr>
                         <a:t>banana</a:t>
                       </a:r>
                       <a:endParaRPr lang="ko-KR" altLang="en-US" dirty="0">
@@ -10107,6 +10306,64 @@
                           <a:latin typeface="D2Coding" panose="020B0609020101020101" pitchFamily="49" charset="-127"/>
                           <a:ea typeface="D2Coding" panose="020B0609020101020101" pitchFamily="49" charset="-127"/>
                         </a:rPr>
+                        <a:t>J103</a:t>
+                      </a:r>
+                      <a:endParaRPr lang="ko-KR" altLang="en-US" dirty="0">
+                        <a:latin typeface="D2Coding" panose="020B0609020101020101" pitchFamily="49" charset="-127"/>
+                        <a:ea typeface="D2Coding" panose="020B0609020101020101" pitchFamily="49" charset="-127"/>
+                      </a:endParaRPr>
+                    </a:p>
+                  </a:txBody>
+                  <a:tcPr>
+                    <a:lnL w="12700" cap="flat" cmpd="sng" algn="ctr">
+                      <a:solidFill>
+                        <a:schemeClr val="tx1"/>
+                      </a:solidFill>
+                      <a:prstDash val="solid"/>
+                      <a:round/>
+                      <a:headEnd type="none" w="med" len="med"/>
+                      <a:tailEnd type="none" w="med" len="med"/>
+                    </a:lnL>
+                    <a:lnR w="12700" cap="flat" cmpd="sng" algn="ctr">
+                      <a:solidFill>
+                        <a:schemeClr val="tx1"/>
+                      </a:solidFill>
+                      <a:prstDash val="solid"/>
+                      <a:round/>
+                      <a:headEnd type="none" w="med" len="med"/>
+                      <a:tailEnd type="none" w="med" len="med"/>
+                    </a:lnR>
+                    <a:lnT w="12700" cap="flat" cmpd="sng" algn="ctr">
+                      <a:solidFill>
+                        <a:schemeClr val="tx1"/>
+                      </a:solidFill>
+                      <a:prstDash val="solid"/>
+                      <a:round/>
+                      <a:headEnd type="none" w="med" len="med"/>
+                      <a:tailEnd type="none" w="med" len="med"/>
+                    </a:lnT>
+                    <a:lnB w="12700" cap="flat" cmpd="sng" algn="ctr">
+                      <a:solidFill>
+                        <a:schemeClr val="tx1"/>
+                      </a:solidFill>
+                      <a:prstDash val="solid"/>
+                      <a:round/>
+                      <a:headEnd type="none" w="med" len="med"/>
+                      <a:tailEnd type="none" w="med" len="med"/>
+                    </a:lnB>
+                  </a:tcPr>
+                </a:tc>
+                <a:tc>
+                  <a:txBody>
+                    <a:bodyPr/>
+                    <a:lstStyle/>
+                    <a:p>
+                      <a:pPr algn="ctr" latinLnBrk="1"/>
+                      <a:r>
+                        <a:rPr lang="en-US" altLang="ko-KR" dirty="0">
+                          <a:latin typeface="D2Coding" panose="020B0609020101020101" pitchFamily="49" charset="-127"/>
+                          <a:ea typeface="D2Coding" panose="020B0609020101020101" pitchFamily="49" charset="-127"/>
+                        </a:rPr>
                         <a:t>carrot</a:t>
                       </a:r>
                       <a:endParaRPr lang="ko-KR" altLang="en-US" dirty="0">
@@ -10226,6 +10483,64 @@
                           <a:latin typeface="D2Coding" panose="020B0609020101020101" pitchFamily="49" charset="-127"/>
                           <a:ea typeface="D2Coding" panose="020B0609020101020101" pitchFamily="49" charset="-127"/>
                         </a:rPr>
+                        <a:t>J104</a:t>
+                      </a:r>
+                      <a:endParaRPr lang="ko-KR" altLang="en-US" dirty="0">
+                        <a:latin typeface="D2Coding" panose="020B0609020101020101" pitchFamily="49" charset="-127"/>
+                        <a:ea typeface="D2Coding" panose="020B0609020101020101" pitchFamily="49" charset="-127"/>
+                      </a:endParaRPr>
+                    </a:p>
+                  </a:txBody>
+                  <a:tcPr>
+                    <a:lnL w="12700" cap="flat" cmpd="sng" algn="ctr">
+                      <a:solidFill>
+                        <a:schemeClr val="tx1"/>
+                      </a:solidFill>
+                      <a:prstDash val="solid"/>
+                      <a:round/>
+                      <a:headEnd type="none" w="med" len="med"/>
+                      <a:tailEnd type="none" w="med" len="med"/>
+                    </a:lnL>
+                    <a:lnR w="12700" cap="flat" cmpd="sng" algn="ctr">
+                      <a:solidFill>
+                        <a:schemeClr val="tx1"/>
+                      </a:solidFill>
+                      <a:prstDash val="solid"/>
+                      <a:round/>
+                      <a:headEnd type="none" w="med" len="med"/>
+                      <a:tailEnd type="none" w="med" len="med"/>
+                    </a:lnR>
+                    <a:lnT w="12700" cap="flat" cmpd="sng" algn="ctr">
+                      <a:solidFill>
+                        <a:schemeClr val="tx1"/>
+                      </a:solidFill>
+                      <a:prstDash val="solid"/>
+                      <a:round/>
+                      <a:headEnd type="none" w="med" len="med"/>
+                      <a:tailEnd type="none" w="med" len="med"/>
+                    </a:lnT>
+                    <a:lnB w="12700" cap="flat" cmpd="sng" algn="ctr">
+                      <a:solidFill>
+                        <a:schemeClr val="tx1"/>
+                      </a:solidFill>
+                      <a:prstDash val="solid"/>
+                      <a:round/>
+                      <a:headEnd type="none" w="med" len="med"/>
+                      <a:tailEnd type="none" w="med" len="med"/>
+                    </a:lnB>
+                  </a:tcPr>
+                </a:tc>
+                <a:tc>
+                  <a:txBody>
+                    <a:bodyPr/>
+                    <a:lstStyle/>
+                    <a:p>
+                      <a:pPr algn="ctr" latinLnBrk="1"/>
+                      <a:r>
+                        <a:rPr lang="en-US" altLang="ko-KR" dirty="0">
+                          <a:latin typeface="D2Coding" panose="020B0609020101020101" pitchFamily="49" charset="-127"/>
+                          <a:ea typeface="D2Coding" panose="020B0609020101020101" pitchFamily="49" charset="-127"/>
+                        </a:rPr>
                         <a:t>orange</a:t>
                       </a:r>
                       <a:endParaRPr lang="ko-KR" altLang="en-US" dirty="0">
@@ -10334,6 +10649,64 @@
                 </a:extLst>
               </a:tr>
               <a:tr h="353246">
+                <a:tc>
+                  <a:txBody>
+                    <a:bodyPr/>
+                    <a:lstStyle/>
+                    <a:p>
+                      <a:pPr algn="ctr" latinLnBrk="1"/>
+                      <a:r>
+                        <a:rPr lang="en-US" altLang="ko-KR" dirty="0">
+                          <a:latin typeface="D2Coding" panose="020B0609020101020101" pitchFamily="49" charset="-127"/>
+                          <a:ea typeface="D2Coding" panose="020B0609020101020101" pitchFamily="49" charset="-127"/>
+                        </a:rPr>
+                        <a:t>J101</a:t>
+                      </a:r>
+                      <a:endParaRPr lang="ko-KR" altLang="en-US" dirty="0">
+                        <a:latin typeface="D2Coding" panose="020B0609020101020101" pitchFamily="49" charset="-127"/>
+                        <a:ea typeface="D2Coding" panose="020B0609020101020101" pitchFamily="49" charset="-127"/>
+                      </a:endParaRPr>
+                    </a:p>
+                  </a:txBody>
+                  <a:tcPr>
+                    <a:lnL w="12700" cap="flat" cmpd="sng" algn="ctr">
+                      <a:solidFill>
+                        <a:schemeClr val="tx1"/>
+                      </a:solidFill>
+                      <a:prstDash val="solid"/>
+                      <a:round/>
+                      <a:headEnd type="none" w="med" len="med"/>
+                      <a:tailEnd type="none" w="med" len="med"/>
+                    </a:lnL>
+                    <a:lnR w="12700" cap="flat" cmpd="sng" algn="ctr">
+                      <a:solidFill>
+                        <a:schemeClr val="tx1"/>
+                      </a:solidFill>
+                      <a:prstDash val="solid"/>
+                      <a:round/>
+                      <a:headEnd type="none" w="med" len="med"/>
+                      <a:tailEnd type="none" w="med" len="med"/>
+                    </a:lnR>
+                    <a:lnT w="12700" cap="flat" cmpd="sng" algn="ctr">
+                      <a:solidFill>
+                        <a:schemeClr val="tx1"/>
+                      </a:solidFill>
+                      <a:prstDash val="solid"/>
+                      <a:round/>
+                      <a:headEnd type="none" w="med" len="med"/>
+                      <a:tailEnd type="none" w="med" len="med"/>
+                    </a:lnT>
+                    <a:lnB w="12700" cap="flat" cmpd="sng" algn="ctr">
+                      <a:solidFill>
+                        <a:schemeClr val="tx1"/>
+                      </a:solidFill>
+                      <a:prstDash val="solid"/>
+                      <a:round/>
+                      <a:headEnd type="none" w="med" len="med"/>
+                      <a:tailEnd type="none" w="med" len="med"/>
+                    </a:lnB>
+                  </a:tcPr>
+                </a:tc>
                 <a:tc>
                   <a:txBody>
                     <a:bodyPr/>
